--- a/SDC/教学资料/课件/E3-规格先行与 AI 结对编程.pptx
+++ b/SDC/教学资料/课件/E3-规格先行与 AI 结对编程.pptx
@@ -1412,7 +1412,7 @@
           </a:p>
           <a:p>
             <a:r>
-              <a:t>定义：第二步先写失败测试，并确认改前失败来自业务断言。在基线上 6 项里只有这一项失败，失败点是密码错时的响应码。</a:t>
+              <a:t>定义：第二步先写失败测试，并确认改前失败来自业务断言。在基线上 6 项里只有这一项失败，失败点是密码错时的响应码。怎样把准则和约束交给 AI，步骤③ 展开。</a:t>
             </a:r>
           </a:p>
           <a:p>
